--- a/CTQ_Presentation.pptx
+++ b/CTQ_Presentation.pptx
@@ -1012,7 +1012,7 @@
           <a:lstStyle/>
           <a:p>
             <a:r>
-              <a:t>All four shots are live captures of the current build. Demo script: load sample → results → add patient → unstructured upload.</a:t>
+              <a:t>All four shots are live captures of the current build. Demo script: load sample → results → Hybrid tab → Hindi note upload.</a:t>
             </a:r>
           </a:p>
         </p:txBody>
@@ -6161,7 +6161,7 @@
                 </a:solidFill>
                 <a:latin typeface="Calibri"/>
               </a:rPr>
-              <a:t>Structured form (60+ fields) OR unstructured upload: PDF / photo (OCR) / CSV / Excel / TXT; DistilBERT ML NER extracts the facts from free text</a:t>
+              <a:t>Structured form (60+ fields), structured CSV, unstructured notes (PDF / photo-OCR / CSV / Excel) or BOTH merged (Hybrid tab); Hindi notes auto-translate to English first; DistilBERT ML NER extracts the facts</a:t>
             </a:r>
           </a:p>
         </p:txBody>
@@ -6521,7 +6521,7 @@
                 </a:solidFill>
                 <a:latin typeface="Calibri"/>
               </a:rPr>
-              <a:t>One-click Model Evaluation: bundled sample patients + labels → accuracy, precision, recall, F1, confusion matrix</a:t>
+              <a:t>One-click Model Evaluation: bundled sample patients + labels → accuracy, precision, recall, F1, confusion matrix - against ALL trials or only each patient's top-K best matches</a:t>
             </a:r>
           </a:p>
         </p:txBody>
@@ -6958,7 +6958,44 @@
                 </a:solidFill>
                 <a:latin typeface="Calibri"/>
               </a:rPr>
-              <a:t>the ML NER engine: asks the model targeted clinical questions per note (“What is the patient's HbA1c level?”), then maps span answers into profile fields. ML-only extraction - no regex discovery; negation guards reject spans like “No history of liver disease” as a diagnosis.</a:t>
+              <a:t>the ML NER engine: asks the model targeted clinical questions per note (“What is the patient's HbA1c level?”), then maps span answers into profile fields. ML-only extraction - no regex discovery; negation guards reject spans like “No history of liver disease” as a diagnosis. Non-English notes (Hindi + 12 more scripts) are auto-translated to English first.</a:t>
+            </a:r>
+          </a:p>
+          <a:p>
+            <a:pPr algn="l">
+              <a:lnSpc>
+                <a:spcPct val="108000"/>
+              </a:lnSpc>
+              <a:spcAft>
+                <a:spcPts val="800"/>
+              </a:spcAft>
+            </a:pPr>
+            <a:r>
+              <a:rPr sz="1450" b="1">
+                <a:solidFill>
+                  <a:srgbClr val="388087"/>
+                </a:solidFill>
+                <a:latin typeface="Calibri"/>
+              </a:rPr>
+              <a:t>▪  </a:t>
+            </a:r>
+            <a:r>
+              <a:rPr sz="1450" b="1">
+                <a:solidFill>
+                  <a:srgbClr val="2E6A70"/>
+                </a:solidFill>
+                <a:latin typeface="Calibri"/>
+              </a:rPr>
+              <a:t>Groq LLM (openai/gpt-oss-120b) - </a:t>
+            </a:r>
+            <a:r>
+              <a:rPr sz="1450" b="0">
+                <a:solidFill>
+                  <a:srgbClr val="17323A"/>
+                </a:solidFill>
+                <a:latin typeface="Calibri"/>
+              </a:rPr>
+              <a:t>two jobs: a low-effort multilingual translator (Hindi/Indic notes → English before extraction) and an adversarial second opinion on eligibility - behind a rate-limit circuit breaker with rule-engine fallback.</a:t>
             </a:r>
           </a:p>
           <a:p>
@@ -7417,7 +7454,7 @@
                 </a:solidFill>
                 <a:latin typeface="Calibri"/>
               </a:rPr>
-              <a:t>single-page frontend: Home, Find Trials (Structured / Unstructured tabs, cohort mode), Model Evaluation; client-side routing with react-router; production build served by the API server.</a:t>
+              <a:t>single-page frontend: Home, Find Trials (Structured / Unstructured / Hybrid tabs, cohort mode), Model Evaluation (with top-K ranking scope); client-side routing with react-router; production build served by the API server.</a:t>
             </a:r>
           </a:p>
           <a:p>
@@ -8259,6 +8296,34 @@
                 <a:spcPct val="108000"/>
               </a:lnSpc>
               <a:spcAft>
+                <a:spcPts val="400"/>
+              </a:spcAft>
+            </a:pPr>
+            <a:r>
+              <a:rPr sz="1050" b="1">
+                <a:solidFill>
+                  <a:srgbClr val="388087"/>
+                </a:solidFill>
+                <a:latin typeface="Calibri"/>
+              </a:rPr>
+              <a:t>•  </a:t>
+            </a:r>
+            <a:r>
+              <a:rPr sz="1050" b="0">
+                <a:solidFill>
+                  <a:srgbClr val="17323A"/>
+                </a:solidFill>
+                <a:latin typeface="Calibri"/>
+              </a:rPr>
+              <a:t>A Hindi note (“उम्र 48 वर्ष… मेटफ़ॉर्मिन 500 मिग्रा…”) is auto-translated to English first → the same facts come out (age 48, Metformin, HbA1c 8.5…).</a:t>
+            </a:r>
+          </a:p>
+          <a:p>
+            <a:pPr algn="l">
+              <a:lnSpc>
+                <a:spcPct val="108000"/>
+              </a:lnSpc>
+              <a:spcAft>
                 <a:spcPts val="0"/>
               </a:spcAft>
             </a:pPr>
@@ -8919,7 +8984,7 @@
                 </a:solidFill>
                 <a:latin typeface="Calibri"/>
               </a:rPr>
-              <a:t>Fig:  Find Trials - Structured / Unstructured tabs, cohort controls, one-click samples</a:t>
+              <a:t>Fig:  Find Trials - Structured / Unstructured / Hybrid tabs, cohort controls, one-click samples</a:t>
             </a:r>
           </a:p>
         </p:txBody>
@@ -8992,7 +9057,7 @@
       </p:sp>
       <p:pic>
         <p:nvPicPr>
-          <p:cNvPr id="11" name="Picture 10" descr="04_cohort_mode.png"/>
+          <p:cNvPr id="11" name="Picture 10" descr="04_hybrid_tab.png"/>
           <p:cNvPicPr>
             <a:picLocks noChangeAspect="1"/>
           </p:cNvPicPr>
@@ -9075,7 +9140,7 @@
                 </a:solidFill>
                 <a:latin typeface="Calibri"/>
               </a:rPr>
-              <a:t>Top row: structured tab + results.  Bottom: cohort mode (“2 patients in the cohort”) and the unstructured ML-NER stepper (Patient 1 of 5).</a:t>
+              <a:t>Bottom: Hybrid tab (structured CSV + notes merged per patient) and a Hindi clinical note auto-translated to English, then extracted by the ML NER.</a:t>
             </a:r>
           </a:p>
         </p:txBody>
@@ -9392,7 +9457,7 @@
                 </a:solidFill>
                 <a:latin typeface="Calibri"/>
               </a:rPr>
-              <a:t>Fig:  Model Evaluation - bundled sample data loads both inputs in one click</a:t>
+              <a:t>Fig:  Model Evaluation - one-click bundled sample + ranking scope (All / Top 3 / Top 5 / Top 10)</a:t>
             </a:r>
           </a:p>
         </p:txBody>
@@ -9458,7 +9523,7 @@
                 </a:solidFill>
                 <a:latin typeface="Calibri"/>
               </a:rPr>
-              <a:t>Fig:  Live run - 10 patients, 21 labelled pairs, 100% across all metrics</a:t>
+              <a:t>Fig:  Live top-5 run - pairs outside a patient's top-5 matches are skipped and counted</a:t>
             </a:r>
           </a:p>
         </p:txBody>
@@ -9797,7 +9862,7 @@
         <p:spPr>
           <a:xfrm>
             <a:off x="2148840" y="1691640"/>
-            <a:ext cx="7863840" cy="5609227"/>
+            <a:ext cx="7863840" cy="3220026"/>
           </a:xfrm>
           <a:prstGeom prst="rect">
             <a:avLst/>
@@ -9860,6 +9925,80 @@
                 <a:latin typeface="Calibri"/>
               </a:rPr>
               <a:t>10 synthetic patients, 21 labelled patient-trial pairs → Accuracy 100%, Precision 100%, Recall 100%, F1 100% (TP 11 · FP 0 · FN 0 · TN 10; 0 pairs excluded as insufficient).</a:t>
+            </a:r>
+          </a:p>
+          <a:p>
+            <a:pPr algn="l">
+              <a:lnSpc>
+                <a:spcPct val="108000"/>
+              </a:lnSpc>
+              <a:spcAft>
+                <a:spcPts val="800"/>
+              </a:spcAft>
+            </a:pPr>
+            <a:r>
+              <a:rPr sz="1400" b="1">
+                <a:solidFill>
+                  <a:srgbClr val="388087"/>
+                </a:solidFill>
+                <a:latin typeface="Calibri"/>
+              </a:rPr>
+              <a:t>▪  </a:t>
+            </a:r>
+            <a:r>
+              <a:rPr sz="1400" b="1">
+                <a:solidFill>
+                  <a:srgbClr val="2E6A70"/>
+                </a:solidFill>
+                <a:latin typeface="Calibri"/>
+              </a:rPr>
+              <a:t>Top-5 ranked scope: </a:t>
+            </a:r>
+            <a:r>
+              <a:rPr sz="1400" b="0">
+                <a:solidFill>
+                  <a:srgbClr val="17323A"/>
+                </a:solidFill>
+                <a:latin typeface="Calibri"/>
+              </a:rPr>
+              <a:t>scoring only each patient's 5 best-matching trials (the way a coordinator reads the list) keeps accuracy at 100% - 13 pairs scored, 8 reported as outside the ranked scope.</a:t>
+            </a:r>
+          </a:p>
+          <a:p>
+            <a:pPr algn="l">
+              <a:lnSpc>
+                <a:spcPct val="108000"/>
+              </a:lnSpc>
+              <a:spcAft>
+                <a:spcPts val="800"/>
+              </a:spcAft>
+            </a:pPr>
+            <a:r>
+              <a:rPr sz="1400" b="1">
+                <a:solidFill>
+                  <a:srgbClr val="388087"/>
+                </a:solidFill>
+                <a:latin typeface="Calibri"/>
+              </a:rPr>
+              <a:t>▪  </a:t>
+            </a:r>
+            <a:r>
+              <a:rPr sz="1400" b="1">
+                <a:solidFill>
+                  <a:srgbClr val="2E6A70"/>
+                </a:solidFill>
+                <a:latin typeface="Calibri"/>
+              </a:rPr>
+              <a:t>Multilingual extraction: </a:t>
+            </a:r>
+            <a:r>
+              <a:rPr sz="1400" b="0">
+                <a:solidFill>
+                  <a:srgbClr val="17323A"/>
+                </a:solidFill>
+                <a:latin typeface="Calibri"/>
+              </a:rPr>
+              <a:t>a fully Hindi discharge note auto-translates to English and yields the same complete profile (age, gender, condition, Metformin, HbA1c 8.5, eGFR 80, BP 140/85) - previously only Latin-anchored lab values survived.</a:t>
             </a:r>
           </a:p>
           <a:p>
@@ -10705,7 +10844,7 @@
                 </a:solidFill>
                 <a:latin typeface="Calibri"/>
               </a:rPr>
-              <a:t>Multilingual notes</a:t>
+              <a:t>More languages + voice</a:t>
             </a:r>
           </a:p>
           <a:p>
@@ -10724,7 +10863,7 @@
                 </a:solidFill>
                 <a:latin typeface="Calibri"/>
               </a:rPr>
-              <a:t>Hindi and regional-language clinical text with ICD / LOINC coding</a:t>
+              <a:t>Hindi ships today (13 scripts detected); add regional speech-to-text and ICD / LOINC coding</a:t>
             </a:r>
           </a:p>
         </p:txBody>
@@ -12385,7 +12524,7 @@
                 </a:solidFill>
                 <a:latin typeface="Calibri"/>
               </a:rPr>
-              <a:t>https://limousines-this-phys-due.trycloudflare.com</a:t>
+              <a:t>https://ctq-clinical-trial-qualifier.onrender.com</a:t>
             </a:r>
           </a:p>
           <a:p>
@@ -12404,7 +12543,7 @@
                 </a:solidFill>
                 <a:latin typeface="Calibri"/>
               </a:rPr>
-              <a:t>(temporary demo link — if down, the PDF report CTQ_Full_Project_Report.pdf shows the same screens)</a:t>
+              <a:t>(live deployment - first load after 15 min idle wakes the free-tier server in ~50 s; the PDF report CTQ_Full_Project_Report.pdf shows the same screens)</a:t>
             </a:r>
           </a:p>
         </p:txBody>
@@ -12985,7 +13124,7 @@
                 </a:solidFill>
                 <a:latin typeface="Calibri"/>
               </a:rPr>
-              <a:t>1.  Structured form OR Unstructured tab</a:t>
+              <a:t>1.  Structured · Unstructured · Hybrid tabs</a:t>
             </a:r>
           </a:p>
           <a:p>
@@ -13041,7 +13180,7 @@
                 </a:solidFill>
                 <a:latin typeface="Calibri"/>
               </a:rPr>
-              <a:t>3.  ML NER reads the facts automatically</a:t>
+              <a:t>3.  ML NER reads the facts; Hindi notes auto-translate</a:t>
             </a:r>
           </a:p>
           <a:p>
@@ -13069,7 +13208,7 @@
                 </a:solidFill>
                 <a:latin typeface="Calibri"/>
               </a:rPr>
-              <a:t>4.  Find Trials for one patient or a cohort</a:t>
+              <a:t>4.  Find Trials for one patient or all N patients</a:t>
             </a:r>
           </a:p>
           <a:p>
